--- a/Login_passwordless.pptx
+++ b/Login_passwordless.pptx
@@ -109,6 +109,11 @@
       </a:defRPr>
     </a:lvl9pPr>
   </p:defaultTextStyle>
+  <p:extLst>
+    <p:ext uri="{EFAFB233-063F-42B5-8137-9DF3F51BA10A}">
+      <p15:sldGuideLst xmlns:p15="http://schemas.microsoft.com/office/powerpoint/2012/main"/>
+    </p:ext>
+  </p:extLst>
 </p:presentation>
 </file>
 
@@ -275,7 +280,7 @@
           <a:p>
             <a:fld id="{1160EA64-D806-43AC-9DF2-F8C432F32B4C}" type="datetimeFigureOut">
               <a:rPr lang="en-US" dirty="0"/>
-              <a:t>3/12/2026</a:t>
+              <a:t>3/16/2026</a:t>
             </a:fld>
             <a:endParaRPr lang="en-US" dirty="0"/>
           </a:p>
@@ -441,7 +446,7 @@
           <a:p>
             <a:fld id="{E9F9C37B-1D36-470B-8223-D6C91242EC14}" type="datetimeFigureOut">
               <a:rPr lang="en-US" dirty="0"/>
-              <a:t>3/12/2026</a:t>
+              <a:t>3/16/2026</a:t>
             </a:fld>
             <a:endParaRPr lang="en-US" dirty="0"/>
           </a:p>
@@ -616,7 +621,7 @@
           <a:p>
             <a:fld id="{67C6F52A-A82B-47A2-A83A-8C4C91F2D59F}" type="datetimeFigureOut">
               <a:rPr lang="en-US" dirty="0"/>
-              <a:t>3/12/2026</a:t>
+              <a:t>3/16/2026</a:t>
             </a:fld>
             <a:endParaRPr lang="en-US" dirty="0"/>
           </a:p>
@@ -781,7 +786,7 @@
           <a:p>
             <a:fld id="{F070A7B3-6521-4DCA-87E5-044747A908C1}" type="datetimeFigureOut">
               <a:rPr lang="en-US" dirty="0"/>
-              <a:t>3/12/2026</a:t>
+              <a:t>3/16/2026</a:t>
             </a:fld>
             <a:endParaRPr lang="en-US" dirty="0"/>
           </a:p>
@@ -1045,7 +1050,7 @@
           <a:p>
             <a:fld id="{1160EA64-D806-43AC-9DF2-F8C432F32B4C}" type="datetimeFigureOut">
               <a:rPr lang="en-US" dirty="0"/>
-              <a:t>3/12/2026</a:t>
+              <a:t>3/16/2026</a:t>
             </a:fld>
             <a:endParaRPr lang="en-US" dirty="0"/>
           </a:p>
@@ -1273,7 +1278,7 @@
           <a:p>
             <a:fld id="{AB134690-1557-4C89-A502-4959FE7FAD70}" type="datetimeFigureOut">
               <a:rPr lang="en-US" dirty="0"/>
-              <a:t>3/12/2026</a:t>
+              <a:t>3/16/2026</a:t>
             </a:fld>
             <a:endParaRPr lang="en-US" dirty="0"/>
           </a:p>
@@ -1627,7 +1632,7 @@
           <a:p>
             <a:fld id="{4F7D4976-E339-4826-83B7-FBD03F55ECF8}" type="datetimeFigureOut">
               <a:rPr lang="en-US" dirty="0"/>
-              <a:t>3/12/2026</a:t>
+              <a:t>3/16/2026</a:t>
             </a:fld>
             <a:endParaRPr lang="en-US" dirty="0"/>
           </a:p>
@@ -1763,7 +1768,7 @@
           <a:p>
             <a:fld id="{E1037C31-9E7A-4F99-8774-A0E530DE1A42}" type="datetimeFigureOut">
               <a:rPr lang="en-US" dirty="0"/>
-              <a:t>3/12/2026</a:t>
+              <a:t>3/16/2026</a:t>
             </a:fld>
             <a:endParaRPr lang="en-US" dirty="0"/>
           </a:p>
@@ -1853,7 +1858,7 @@
           <a:p>
             <a:fld id="{C278504F-A551-4DE0-9316-4DCD1D8CC752}" type="datetimeFigureOut">
               <a:rPr lang="en-US" dirty="0"/>
-              <a:t>3/12/2026</a:t>
+              <a:t>3/16/2026</a:t>
             </a:fld>
             <a:endParaRPr lang="en-US" dirty="0"/>
           </a:p>
@@ -2205,7 +2210,7 @@
           <a:p>
             <a:fld id="{D1BE4249-C0D0-4B06-8692-E8BB871AF643}" type="datetimeFigureOut">
               <a:rPr lang="en-US" dirty="0"/>
-              <a:t>3/12/2026</a:t>
+              <a:t>3/16/2026</a:t>
             </a:fld>
             <a:endParaRPr lang="en-US" dirty="0"/>
           </a:p>
@@ -2557,7 +2562,7 @@
           <a:p>
             <a:fld id="{042B0DB6-F5C7-45FB-8CF3-31B45F9C2DAC}" type="datetimeFigureOut">
               <a:rPr lang="en-US" dirty="0"/>
-              <a:t>3/12/2026</a:t>
+              <a:t>3/16/2026</a:t>
             </a:fld>
             <a:endParaRPr lang="en-US" dirty="0"/>
           </a:p>
@@ -2794,7 +2799,7 @@
           <a:p>
             <a:fld id="{1160EA64-D806-43AC-9DF2-F8C432F32B4C}" type="datetimeFigureOut">
               <a:rPr lang="en-US" dirty="0"/>
-              <a:t>3/12/2026</a:t>
+              <a:t>3/16/2026</a:t>
             </a:fld>
             <a:endParaRPr lang="en-US" dirty="0"/>
           </a:p>
@@ -3836,7 +3841,7 @@
           <a:p>
             <a:r>
               <a:rPr lang="it-IT" dirty="0"/>
-              <a:t>Il server decifra la firma e autorizza l’accesso</a:t>
+              <a:t>Il server decifra la firma e autorizza l’accesso.</a:t>
             </a:r>
           </a:p>
         </p:txBody>
@@ -3857,6 +3862,16 @@
 <file path=ppt/slides/slide5.xml><?xml version="1.0" encoding="utf-8"?>
 <p:sld xmlns:a="http://schemas.openxmlformats.org/drawingml/2006/main" xmlns:r="http://schemas.openxmlformats.org/officeDocument/2006/relationships" xmlns:p="http://schemas.openxmlformats.org/presentationml/2006/main">
   <p:cSld>
+    <p:bg>
+      <p:bgPr>
+        <a:solidFill>
+          <a:schemeClr val="bg1">
+            <a:lumMod val="95000"/>
+          </a:schemeClr>
+        </a:solidFill>
+        <a:effectLst/>
+      </p:bgPr>
+    </p:bg>
     <p:spTree>
       <p:nvGrpSpPr>
         <p:cNvPr id="1" name=""/>
@@ -3887,26 +3902,30 @@
             <p:ph type="title"/>
           </p:nvPr>
         </p:nvSpPr>
-        <p:spPr/>
-        <p:txBody>
-          <a:bodyPr/>
-          <a:lstStyle/>
-          <a:p>
-            <a:r>
-              <a:rPr lang="it-IT" dirty="0"/>
-              <a:t>FIDO2 / </a:t>
-            </a:r>
-            <a:r>
-              <a:rPr lang="it-IT" dirty="0" err="1"/>
-              <a:t>WebAuthn</a:t>
+        <p:spPr>
+          <a:xfrm>
+            <a:off x="804672" y="964692"/>
+            <a:ext cx="5894832" cy="1188720"/>
+          </a:xfrm>
+        </p:spPr>
+        <p:txBody>
+          <a:bodyPr>
+            <a:normAutofit/>
+          </a:bodyPr>
+          <a:lstStyle/>
+          <a:p>
+            <a:r>
+              <a:rPr lang="it-IT"/>
+              <a:t>FIDO2 / WebAuthn</a:t>
             </a:r>
             <a:br>
-              <a:rPr lang="it-IT" dirty="0"/>
+              <a:rPr lang="it-IT"/>
             </a:br>
             <a:r>
-              <a:rPr lang="it-IT" dirty="0"/>
+              <a:rPr lang="it-IT"/>
               <a:t>Registrazione diretta</a:t>
             </a:r>
+            <a:endParaRPr lang="it-IT" dirty="0"/>
           </a:p>
         </p:txBody>
       </p:sp>
@@ -3926,51 +3945,227 @@
             <p:ph idx="1"/>
           </p:nvPr>
         </p:nvSpPr>
-        <p:spPr/>
-        <p:txBody>
-          <a:bodyPr/>
-          <a:lstStyle/>
-          <a:p>
-            <a:r>
-              <a:rPr lang="it-IT" b="1" dirty="0"/>
+        <p:spPr>
+          <a:xfrm>
+            <a:off x="803243" y="2638044"/>
+            <a:ext cx="5963317" cy="3263206"/>
+          </a:xfrm>
+        </p:spPr>
+        <p:txBody>
+          <a:bodyPr>
+            <a:normAutofit/>
+          </a:bodyPr>
+          <a:lstStyle/>
+          <a:p>
+            <a:r>
+              <a:rPr lang="it-IT" b="1"/>
               <a:t>Nessun segreto condiviso</a:t>
             </a:r>
             <a:r>
-              <a:rPr lang="it-IT" dirty="0"/>
+              <a:rPr lang="it-IT"/>
               <a:t>: solo la chiave pubblica e il </a:t>
             </a:r>
             <a:r>
-              <a:rPr lang="it-IT" i="1" dirty="0" err="1"/>
+              <a:rPr lang="it-IT" i="1"/>
               <a:t>credentialID</a:t>
             </a:r>
             <a:r>
-              <a:rPr lang="it-IT" dirty="0"/>
+              <a:rPr lang="it-IT"/>
               <a:t> vengono inviati e salvati sul server. </a:t>
             </a:r>
           </a:p>
           <a:p>
             <a:r>
-              <a:rPr lang="it-IT" b="1" dirty="0"/>
+              <a:rPr lang="it-IT" b="1"/>
               <a:t>Protezione biometrica locale</a:t>
             </a:r>
             <a:r>
-              <a:rPr lang="it-IT" dirty="0"/>
+              <a:rPr lang="it-IT"/>
               <a:t>: i dati dell’impronta o del pin non transitano in rete, ma rimangono nell’hardware locale.</a:t>
             </a:r>
-            <a:endParaRPr lang="it-IT" i="1" dirty="0"/>
-          </a:p>
-          <a:p>
-            <a:r>
-              <a:rPr lang="it-IT" b="1" dirty="0"/>
+            <a:endParaRPr lang="it-IT" i="1"/>
+          </a:p>
+          <a:p>
+            <a:r>
+              <a:rPr lang="it-IT" b="1"/>
               <a:t>Prevenzione Attacchi di Replay</a:t>
             </a:r>
             <a:r>
-              <a:rPr lang="it-IT" dirty="0"/>
-              <a:t>: </a:t>
-            </a:r>
-          </a:p>
-        </p:txBody>
-      </p:sp>
+              <a:rPr lang="it-IT"/>
+              <a:t>: il server utilizza un contatore delle firme (</a:t>
+            </a:r>
+            <a:r>
+              <a:rPr lang="it-IT" i="1"/>
+              <a:t>signCount</a:t>
+            </a:r>
+            <a:r>
+              <a:rPr lang="it-IT"/>
+              <a:t>) e una challenge monouso per scartare comunicazioni intercettate.</a:t>
+            </a:r>
+            <a:endParaRPr lang="it-IT" dirty="0"/>
+          </a:p>
+        </p:txBody>
+      </p:sp>
+      <p:sp>
+        <p:nvSpPr>
+          <p:cNvPr id="10" name="Rectangle 9">
+            <a:extLst>
+              <a:ext uri="{FF2B5EF4-FFF2-40B4-BE49-F238E27FC236}">
+                <a16:creationId xmlns:a16="http://schemas.microsoft.com/office/drawing/2014/main" id="{879398A9-0D0D-4901-BDDF-B3D93CECA7B9}"/>
+              </a:ext>
+              <a:ext uri="{C183D7F6-B498-43B3-948B-1728B52AA6E4}">
+                <adec:decorative xmlns:adec="http://schemas.microsoft.com/office/drawing/2017/decorative" val="1"/>
+              </a:ext>
+            </a:extLst>
+          </p:cNvPr>
+          <p:cNvSpPr>
+            <a:spLocks noGrp="1" noRot="1" noChangeAspect="1" noMove="1" noResize="1" noEditPoints="1" noAdjustHandles="1" noChangeArrowheads="1" noChangeShapeType="1" noTextEdit="1"/>
+          </p:cNvSpPr>
+          <p:nvPr>
+            <p:extLst>
+              <p:ext uri="{386F3935-93C4-4BCD-93E2-E3B085C9AB24}">
+                <p16:designElem xmlns:p16="http://schemas.microsoft.com/office/powerpoint/2015/main" val="1"/>
+              </p:ext>
+            </p:extLst>
+          </p:nvPr>
+        </p:nvSpPr>
+        <p:spPr>
+          <a:xfrm>
+            <a:off x="7386706" y="964692"/>
+            <a:ext cx="3986784" cy="4936558"/>
+          </a:xfrm>
+          <a:prstGeom prst="rect">
+            <a:avLst/>
+          </a:prstGeom>
+          <a:noFill/>
+          <a:ln w="31750" cap="sq">
+            <a:solidFill>
+              <a:srgbClr val="FFFFFF"/>
+            </a:solidFill>
+            <a:miter lim="800000"/>
+          </a:ln>
+        </p:spPr>
+        <p:style>
+          <a:lnRef idx="2">
+            <a:schemeClr val="accent1">
+              <a:shade val="50000"/>
+            </a:schemeClr>
+          </a:lnRef>
+          <a:fillRef idx="1">
+            <a:schemeClr val="accent1"/>
+          </a:fillRef>
+          <a:effectRef idx="0">
+            <a:schemeClr val="accent1"/>
+          </a:effectRef>
+          <a:fontRef idx="minor">
+            <a:schemeClr val="lt1"/>
+          </a:fontRef>
+        </p:style>
+        <p:txBody>
+          <a:bodyPr rtlCol="0" anchor="ctr"/>
+          <a:lstStyle/>
+          <a:p>
+            <a:pPr algn="ctr"/>
+            <a:endParaRPr lang="en-US" dirty="0"/>
+          </a:p>
+        </p:txBody>
+      </p:sp>
+      <p:sp>
+        <p:nvSpPr>
+          <p:cNvPr id="12" name="Rectangle 11">
+            <a:extLst>
+              <a:ext uri="{FF2B5EF4-FFF2-40B4-BE49-F238E27FC236}">
+                <a16:creationId xmlns:a16="http://schemas.microsoft.com/office/drawing/2014/main" id="{011FEC3B-E514-4E21-B2CB-7903A73569E2}"/>
+              </a:ext>
+              <a:ext uri="{C183D7F6-B498-43B3-948B-1728B52AA6E4}">
+                <adec:decorative xmlns:adec="http://schemas.microsoft.com/office/drawing/2017/decorative" val="1"/>
+              </a:ext>
+            </a:extLst>
+          </p:cNvPr>
+          <p:cNvSpPr>
+            <a:spLocks noGrp="1" noRot="1" noChangeAspect="1" noMove="1" noResize="1" noEditPoints="1" noAdjustHandles="1" noChangeArrowheads="1" noChangeShapeType="1" noTextEdit="1"/>
+          </p:cNvSpPr>
+          <p:nvPr>
+            <p:extLst>
+              <p:ext uri="{386F3935-93C4-4BCD-93E2-E3B085C9AB24}">
+                <p16:designElem xmlns:p16="http://schemas.microsoft.com/office/powerpoint/2015/main" val="1"/>
+              </p:ext>
+            </p:extLst>
+          </p:nvPr>
+        </p:nvSpPr>
+        <p:spPr>
+          <a:xfrm>
+            <a:off x="7551298" y="1128683"/>
+            <a:ext cx="3657600" cy="4608576"/>
+          </a:xfrm>
+          <a:prstGeom prst="rect">
+            <a:avLst/>
+          </a:prstGeom>
+          <a:solidFill>
+            <a:srgbClr val="FFFFFF"/>
+          </a:solidFill>
+          <a:ln>
+            <a:noFill/>
+          </a:ln>
+        </p:spPr>
+        <p:style>
+          <a:lnRef idx="2">
+            <a:schemeClr val="accent1">
+              <a:shade val="50000"/>
+            </a:schemeClr>
+          </a:lnRef>
+          <a:fillRef idx="1">
+            <a:schemeClr val="accent1"/>
+          </a:fillRef>
+          <a:effectRef idx="0">
+            <a:schemeClr val="accent1"/>
+          </a:effectRef>
+          <a:fontRef idx="minor">
+            <a:schemeClr val="lt1"/>
+          </a:fontRef>
+        </p:style>
+        <p:txBody>
+          <a:bodyPr rtlCol="0" anchor="ctr"/>
+          <a:lstStyle/>
+          <a:p>
+            <a:pPr algn="ctr"/>
+            <a:endParaRPr lang="en-US"/>
+          </a:p>
+        </p:txBody>
+      </p:sp>
+      <p:pic>
+        <p:nvPicPr>
+          <p:cNvPr id="5" name="Immagine 4">
+            <a:extLst>
+              <a:ext uri="{FF2B5EF4-FFF2-40B4-BE49-F238E27FC236}">
+                <a16:creationId xmlns:a16="http://schemas.microsoft.com/office/drawing/2014/main" id="{598E36CB-3561-ED84-F158-9BFBA8C956DE}"/>
+              </a:ext>
+            </a:extLst>
+          </p:cNvPr>
+          <p:cNvPicPr>
+            <a:picLocks noChangeAspect="1"/>
+          </p:cNvPicPr>
+          <p:nvPr/>
+        </p:nvPicPr>
+        <p:blipFill>
+          <a:blip r:embed="rId2"/>
+          <a:srcRect l="2108" t="1745" r="3488" b="1951"/>
+          <a:stretch>
+            <a:fillRect/>
+          </a:stretch>
+        </p:blipFill>
+        <p:spPr>
+          <a:xfrm>
+            <a:off x="7715890" y="1685019"/>
+            <a:ext cx="3328416" cy="3495903"/>
+          </a:xfrm>
+          <a:prstGeom prst="roundRect">
+            <a:avLst>
+              <a:gd name="adj" fmla="val 4392"/>
+            </a:avLst>
+          </a:prstGeom>
+        </p:spPr>
+      </p:pic>
     </p:spTree>
     <p:extLst>
       <p:ext uri="{BB962C8B-B14F-4D97-AF65-F5344CB8AC3E}">

--- a/Login_passwordless.pptx
+++ b/Login_passwordless.pptx
@@ -3421,13 +3421,27 @@
           <a:p>
             <a:r>
               <a:rPr lang="it-IT" dirty="0"/>
-              <a:t>Il token viene inviato all’utente tramite un link via e-mail.</a:t>
+              <a:t>Il server costruisce l’URL personalizzato e lo recapita all’utente tramite posta elettronica.</a:t>
             </a:r>
           </a:p>
           <a:p>
             <a:r>
               <a:rPr lang="it-IT" dirty="0"/>
               <a:t>Al click, il server verifica la validità del token e autorizza l’accesso.</a:t>
+            </a:r>
+          </a:p>
+          <a:p>
+            <a:r>
+              <a:rPr lang="it-IT" dirty="0"/>
+              <a:t>In caso di successo, il </a:t>
+            </a:r>
+            <a:r>
+              <a:rPr lang="it-IT"/>
+              <a:t>token viene eliminato </a:t>
+            </a:r>
+            <a:r>
+              <a:rPr lang="it-IT" dirty="0"/>
+              <a:t>e l’utente viene reindirizzato nell’area protetta.</a:t>
             </a:r>
           </a:p>
         </p:txBody>
@@ -3841,7 +3855,7 @@
           <a:p>
             <a:r>
               <a:rPr lang="it-IT" dirty="0"/>
-              <a:t>Il server decifra la firma e autorizza l’accesso.</a:t>
+              <a:t>Il server verifica la firma tramite la chiave pubblica e autorizza l’accesso.</a:t>
             </a:r>
           </a:p>
         </p:txBody>
@@ -3915,17 +3929,20 @@
           <a:lstStyle/>
           <a:p>
             <a:r>
-              <a:rPr lang="it-IT"/>
-              <a:t>FIDO2 / WebAuthn</a:t>
+              <a:rPr lang="it-IT" dirty="0"/>
+              <a:t>FIDO2 / </a:t>
+            </a:r>
+            <a:r>
+              <a:rPr lang="it-IT" dirty="0" err="1"/>
+              <a:t>WebAuthn</a:t>
             </a:r>
             <a:br>
-              <a:rPr lang="it-IT"/>
+              <a:rPr lang="it-IT" dirty="0"/>
             </a:br>
             <a:r>
-              <a:rPr lang="it-IT"/>
-              <a:t>Registrazione diretta</a:t>
-            </a:r>
-            <a:endParaRPr lang="it-IT" dirty="0"/>
+              <a:rPr lang="it-IT" dirty="0"/>
+              <a:t>Sicurezza</a:t>
+            </a:r>
           </a:p>
         </p:txBody>
       </p:sp>
